--- a/A2A协议2.0_AI智能体演进路线图_2026_V17_无水印.pptx
+++ b/A2A协议2.0_AI智能体演进路线图_2026_V17_无水印.pptx
@@ -3815,7 +3815,7 @@
                           </a:solidFill>
                           <a:latin typeface="Microsoft YaHei"/>
                         </a:rPr>
-                        <a:t>LangChain v0.1.x + RAG 2.0 + LlamaIndex</a:t>
+                        <a:t>LangChain v0.1.x + RAG v2.0.0 + LlamaIndex</a:t>
                       </a:r>
                     </a:p>
                   </a:txBody>
@@ -3911,7 +3911,7 @@
                           </a:solidFill>
                           <a:latin typeface="Microsoft YaHei"/>
                         </a:rPr>
-                        <a:t>【突破】完成RAG 2.0升级；【事件】多模态API发布；【未达成】长上下文理解未达预期；【展望】Q2实现智能问答落地</a:t>
+                        <a:t>【突破】完成RAG v2.0.0升级；【事件】多模态API发布；【未达成】长上下文理解未达预期；【展望】Q2实现智能问答落地</a:t>
                       </a:r>
                     </a:p>
                   </a:txBody>
@@ -4081,7 +4081,7 @@
                           </a:solidFill>
                           <a:latin typeface="Microsoft YaHei"/>
                         </a:rPr>
-                        <a:t>LangChain v0.1.x + RAG 2.0 + LlamaIndex</a:t>
+                        <a:t>LangChain v0.1.x + RAG v2.0.0 + LlamaIndex</a:t>
                       </a:r>
                     </a:p>
                   </a:txBody>

--- a/A2A协议2.0_AI智能体演进路线图_2026_V17_无水印.pptx
+++ b/A2A协议2.0_AI智能体演进路线图_2026_V17_无水印.pptx
@@ -3815,7 +3815,7 @@
                           </a:solidFill>
                           <a:latin typeface="Microsoft YaHei"/>
                         </a:rPr>
-                        <a:t>LangChain v0.1.x + RAG v2.0.0 + LlamaIndex</a:t>
+                        <a:t>LangChain v0.1.x + RAG v3.0.0 + LlamaIndex</a:t>
                       </a:r>
                     </a:p>
                   </a:txBody>
@@ -3911,7 +3911,7 @@
                           </a:solidFill>
                           <a:latin typeface="Microsoft YaHei"/>
                         </a:rPr>
-                        <a:t>【突破】完成RAG v2.0.0升级；【事件】多模态API发布；【未达成】长上下文理解未达预期；【展望】Q2实现智能问答落地</a:t>
+                        <a:t>【突破】完成RAG v3.0.0升级；【事件】多模态API发布；【未达成】长上下文理解未达预期；【展望】Q2实现智能问答落地</a:t>
                       </a:r>
                     </a:p>
                   </a:txBody>
@@ -4081,7 +4081,7 @@
                           </a:solidFill>
                           <a:latin typeface="Microsoft YaHei"/>
                         </a:rPr>
-                        <a:t>LangChain v0.1.x + RAG v2.0.0 + LlamaIndex</a:t>
+                        <a:t>LangChain v0.1.x + RAG v3.0.0 + LlamaIndex</a:t>
                       </a:r>
                     </a:p>
                   </a:txBody>
